--- a/tests/fixtures/g0-1/normal-10-slides-notes.pptx
+++ b/tests/fixtures/g0-1/normal-10-slides-notes.pptx
@@ -4,6 +4,9 @@
   <p:sldMasterIdLst>
     <p:sldMasterId id="2147483648" r:id="rId1"/>
   </p:sldMasterIdLst>
+  <p:notesMasterIdLst>
+    <p:notesMasterId r:id="rId8"/>
+  </p:notesMasterIdLst>
   <p:sldIdLst>
     <p:sldId id="256" r:id="rId7"/>
     <p:sldId id="257" r:id="rId9"/>
